--- a/output/presentation/Soutenance_PFA_Vulgarisee_FR.pptx
+++ b/output/presentation/Soutenance_PFA_Vulgarisee_FR.pptx
@@ -1016,7 +1016,7 @@
           <a:lstStyle/>
           <a:p>
             <a:r>
-              <a:t>Les résultats, hors échantillon et nets de frais. Les stratégies se tiennent, y compris à travers 2008, 2020 et 2022 — aucune ne décroche. La vraie question n’est donc pas « est-ce que ça marche », mais « l’écart entre ces courbes est-il réel ». C’est exactement ce que la chaîne sait trancher. [~60 s]</a:t>
+              <a:t>Les résultats, hors échantillon et nets de frais. La bande bleue claire, c’est l’ensemble des références classiques : son bord bas est la moins bonne, son bord haut la meilleure. La ligne foncée est notre système à régimes. Il reste dans la bande du début à la fin, 2008, 2020 et 2022 compris. La vraie question n’est donc pas « est-ce que ça marche », mais « l’écart est-il réel ou dans le bruit » — et c’est exactement ce que la chaîne sait trancher. [~60 s]</a:t>
             </a:r>
           </a:p>
         </p:txBody>
@@ -9582,14 +9582,14 @@
                 </a:solidFill>
                 <a:latin typeface="Arial"/>
               </a:rPr>
-              <a:t>À gauche l’univers mixte marocain, à droite vingt ans d’ETF internationaux couvrant 2008, 2020 et 2022.</a:t>
+              <a:t>Deux terrains évalués séparément : quatre ans au Maroc, vingt ans à l’international — 2008, 2020 et 2022 compris.</a:t>
             </a:r>
           </a:p>
         </p:txBody>
       </p:sp>
       <p:pic>
         <p:nvPicPr>
-          <p:cNvPr id="6" name="Picture 5" descr="courbes_equity.png"/>
+          <p:cNvPr id="6" name="Picture 5" descr="courbes_equity_fr.png"/>
           <p:cNvPicPr>
             <a:picLocks noChangeAspect="1"/>
           </p:cNvPicPr>
@@ -9603,8 +9603,8 @@
         </p:blipFill>
         <p:spPr>
           <a:xfrm>
-            <a:off x="1587656" y="1498600"/>
-            <a:ext cx="9016687" cy="4064000"/>
+            <a:off x="951955" y="1320800"/>
+            <a:ext cx="10288089" cy="4622800"/>
           </a:xfrm>
           <a:prstGeom prst="rect">
             <a:avLst/>
@@ -9619,8 +9619,8 @@
         </p:nvSpPr>
         <p:spPr>
           <a:xfrm>
-            <a:off x="609600" y="5689600"/>
-            <a:ext cx="10972800" cy="787400"/>
+            <a:off x="609600" y="6045200"/>
+            <a:ext cx="10972800" cy="660400"/>
           </a:xfrm>
           <a:prstGeom prst="roundRect">
             <a:avLst>
@@ -9665,8 +9665,8 @@
         </p:nvSpPr>
         <p:spPr>
           <a:xfrm>
-            <a:off x="889000" y="5867400"/>
-            <a:ext cx="10414000" cy="508000"/>
+            <a:off x="889000" y="6210300"/>
+            <a:ext cx="10414000" cy="431800"/>
           </a:xfrm>
           <a:prstGeom prst="rect">
             <a:avLst/>
@@ -9691,7 +9691,7 @@
                 </a:solidFill>
                 <a:latin typeface="Arial"/>
               </a:rPr>
-              <a:t>Les stratégies se tiennent : aucune ne décroche, y compris à travers les crises. La question n’est donc pas « est-ce que ça marche »,</a:t>
+              <a:t>La bande couvre les trois références classiques, du moins au mieux. Le système ML reste dedans d’un bout à l’autre, crises comprises :</a:t>
             </a:r>
           </a:p>
           <a:p>
@@ -9707,7 +9707,7 @@
                 </a:solidFill>
                 <a:latin typeface="Arial"/>
               </a:rPr>
-              <a:t>mais « l’écart entre ces courbes est-il réel ou dans le bruit » — et c’est précisément ce que la chaîne sait trancher.</a:t>
+              <a:t>la question n’est donc pas « est-ce que ça marche », mais « l’écart est-il réel ou dans le bruit » — et c’est ce que la chaîne sait trancher.</a:t>
             </a:r>
           </a:p>
         </p:txBody>
